--- a/Brasileirao/Poster_Brasileirao.pptx
+++ b/Brasileirao/Poster_Brasileirao.pptx
@@ -267,7 +267,7 @@
       </p15:sldGuideLst>
     </p:ext>
     <p:ext uri="GoogleSlidesCustomDataVersion2">
-      <go:slidesCustomData xmlns:go="http://customooxmlschemas.google.com/" xmlns:ahyp="http://schemas.microsoft.com/office/drawing/2018/hyperlinkcolor" xmlns:p15="http://schemas.microsoft.com/office/powerpoint/2012/main" xmlns:p14="http://schemas.microsoft.com/office/powerpoint/2010/main" xmlns:com="http://schemas.openxmlformats.org/drawingml/2006/compatibility" xmlns:pvml="urn:schemas-microsoft-com:office:powerpoint" xmlns:v="urn:schemas-microsoft-com:vml" xmlns:o="urn:schemas-microsoft-com:office:office" xmlns:dgm="http://schemas.openxmlformats.org/drawingml/2006/diagram" xmlns:c="http://schemas.openxmlformats.org/drawingml/2006/chart" xmlns:mv="urn:schemas-microsoft-com:mac:vml" xmlns:mc="http://schemas.openxmlformats.org/markup-compatibility/2006" xmlns="" r:id="rId7" roundtripDataSignature="AMtx7mhsp+FRlBeH/1tlbrDwfuOaZsMzjQ=="/>
+      <go:slidesCustomData xmlns="" xmlns:mc="http://schemas.openxmlformats.org/markup-compatibility/2006" xmlns:mv="urn:schemas-microsoft-com:mac:vml" xmlns:c="http://schemas.openxmlformats.org/drawingml/2006/chart" xmlns:dgm="http://schemas.openxmlformats.org/drawingml/2006/diagram" xmlns:o="urn:schemas-microsoft-com:office:office" xmlns:v="urn:schemas-microsoft-com:vml" xmlns:pvml="urn:schemas-microsoft-com:office:powerpoint" xmlns:com="http://schemas.openxmlformats.org/drawingml/2006/compatibility" xmlns:p14="http://schemas.microsoft.com/office/powerpoint/2010/main" xmlns:p15="http://schemas.microsoft.com/office/powerpoint/2012/main" xmlns:ahyp="http://schemas.microsoft.com/office/drawing/2018/hyperlinkcolor" xmlns:go="http://customooxmlschemas.google.com/" r:id="rId7" roundtripDataSignature="AMtx7mhsp+FRlBeH/1tlbrDwfuOaZsMzjQ=="/>
     </p:ext>
   </p:extLst>
 </p:presentation>
@@ -17301,11 +17301,10 @@
                 </a:r>
               </a:p>
               <a:p>
-                <a:pPr algn="l">
+                <a:pPr>
                   <a:lnSpc>
                     <a:spcPct val="108000"/>
                   </a:lnSpc>
-                  <a:buNone/>
                   <a:defRPr sz="3600" b="0">
                     <a:solidFill>
                       <a:srgbClr val="111111"/>
@@ -17395,15 +17394,18 @@
                         <m:t>=</m:t>
                       </m:r>
                       <m:r>
-                        <a:rPr lang="pt-BR" sz="3600" b="0" i="1" smtClean="0">
+                        <m:rPr>
+                          <m:sty m:val="p"/>
+                        </m:rPr>
+                        <a:rPr lang="pt-BR" sz="3600">
                           <a:solidFill>
                             <a:srgbClr val="111111"/>
                           </a:solidFill>
                           <a:latin typeface="Cambria Math" panose="02040503050406030204" pitchFamily="18" charset="0"/>
-                          <a:ea typeface="Cambria Math" panose="02040503050406030204" pitchFamily="18" charset="0"/>
+                          <a:ea typeface="Calibri"/>
                           <a:cs typeface="Calibri"/>
                         </a:rPr>
-                        <m:t>𝜑</m:t>
+                        <m:t>Φ</m:t>
                       </m:r>
                       <m:d>
                         <m:dPr>
@@ -17501,15 +17503,18 @@
                         <m:t>−</m:t>
                       </m:r>
                       <m:r>
-                        <a:rPr lang="pt-BR" sz="3600" b="0" i="1" smtClean="0">
+                        <m:rPr>
+                          <m:sty m:val="p"/>
+                        </m:rPr>
+                        <a:rPr lang="pt-BR" sz="3600">
                           <a:solidFill>
                             <a:srgbClr val="111111"/>
                           </a:solidFill>
                           <a:latin typeface="Cambria Math" panose="02040503050406030204" pitchFamily="18" charset="0"/>
-                          <a:ea typeface="Cambria Math" panose="02040503050406030204" pitchFamily="18" charset="0"/>
+                          <a:ea typeface="Calibri"/>
                           <a:cs typeface="Calibri"/>
                         </a:rPr>
-                        <m:t>𝜑</m:t>
+                        <m:t>Φ</m:t>
                       </m:r>
                       <m:d>
                         <m:dPr>
@@ -17798,8 +17803,8 @@
           </a:p>
         </p:txBody>
       </p:sp>
-      <mc:AlternateContent xmlns:mc="http://schemas.openxmlformats.org/markup-compatibility/2006">
-        <mc:Choice xmlns:a14="http://schemas.microsoft.com/office/drawing/2010/main" Requires="a14">
+      <mc:AlternateContent xmlns:mc="http://schemas.openxmlformats.org/markup-compatibility/2006" xmlns:a14="http://schemas.microsoft.com/office/drawing/2010/main">
+        <mc:Choice Requires="a14">
           <p:sp>
             <p:nvSpPr>
               <p:cNvPr id="1018" name="skew-def">
@@ -18543,7 +18548,7 @@
             </p:txBody>
           </p:sp>
         </mc:Choice>
-        <mc:Fallback>
+        <mc:Fallback xmlns="">
           <p:sp>
             <p:nvSpPr>
               <p:cNvPr id="1018" name="skew-def">
@@ -18740,8 +18745,8 @@
           </a:p>
         </p:txBody>
       </p:sp>
-      <mc:AlternateContent xmlns:mc="http://schemas.openxmlformats.org/markup-compatibility/2006">
-        <mc:Choice xmlns:a14="http://schemas.microsoft.com/office/drawing/2010/main" Requires="a14">
+      <mc:AlternateContent xmlns:mc="http://schemas.openxmlformats.org/markup-compatibility/2006" xmlns:a14="http://schemas.microsoft.com/office/drawing/2010/main">
+        <mc:Choice Requires="a14">
           <p:sp>
             <p:nvSpPr>
               <p:cNvPr id="1022" name="weibull-def">
@@ -19020,7 +19025,7 @@
                         <a:latin typeface="Cambria Math" panose="02040503050406030204" pitchFamily="18" charset="0"/>
                         <a:ea typeface="Cambria Math" panose="02040503050406030204" pitchFamily="18" charset="0"/>
                       </a:rPr>
-                      <m:t>-</m:t>
+                      <m:t>−</m:t>
                     </m:r>
                     <m:r>
                       <m:rPr>
@@ -19962,12 +19967,11 @@
                   </a:rPr>
                   <a:t>.</a:t>
                 </a:r>
-                <a14:m/>
               </a:p>
             </p:txBody>
           </p:sp>
         </mc:Choice>
-        <mc:Fallback>
+        <mc:Fallback xmlns="">
           <p:sp>
             <p:nvSpPr>
               <p:cNvPr id="1022" name="weibull-def">
@@ -20381,7 +20385,7 @@
           <p:nvPr>
             <p:extLst>
               <p:ext uri="{D42A27DB-BD31-4B8C-83A1-F6EECF244321}">
-                <p14:modId xmlns:p14="http://schemas.microsoft.com/office/powerpoint/2010/main" val="2312607928"/>
+                <p14:modId xmlns:p14="http://schemas.microsoft.com/office/powerpoint/2010/main" val="3854831112"/>
               </p:ext>
             </p:extLst>
           </p:nvPr>
@@ -21276,8 +21280,8 @@
           </a:p>
         </p:txBody>
       </p:sp>
-      <mc:AlternateContent xmlns:mc="http://schemas.openxmlformats.org/markup-compatibility/2006">
-        <mc:Choice xmlns:a14="http://schemas.microsoft.com/office/drawing/2010/main" Requires="a14">
+      <mc:AlternateContent xmlns:mc="http://schemas.openxmlformats.org/markup-compatibility/2006" xmlns:a14="http://schemas.microsoft.com/office/drawing/2010/main">
+        <mc:Choice Requires="a14">
           <p:sp>
             <p:nvSpPr>
               <p:cNvPr id="3" name="estimacao">
@@ -22220,7 +22224,7 @@
             </p:txBody>
           </p:sp>
         </mc:Choice>
-        <mc:Fallback>
+        <mc:Fallback xmlns="">
           <p:sp>
             <p:nvSpPr>
               <p:cNvPr id="3" name="estimacao">
@@ -22285,7 +22289,7 @@
               <p:nvPr>
                 <p:extLst>
                   <p:ext uri="{D42A27DB-BD31-4B8C-83A1-F6EECF244321}">
-                    <p14:modId xmlns:p14="http://schemas.microsoft.com/office/powerpoint/2010/main" val="172142269"/>
+                    <p14:modId xmlns:p14="http://schemas.microsoft.com/office/powerpoint/2010/main" val="3608648943"/>
                   </p:ext>
                 </p:extLst>
               </p:nvPr>
@@ -22842,6 +22846,7 @@
                         <a:bodyPr/>
                         <a:lstStyle/>
                         <a:p>
+                          <a:pPr algn="ctr"/>
                           <a:r>
                             <a:rPr lang="pt-BR" sz="3200" dirty="0"/>
                             <a:t>760</a:t>
@@ -22855,6 +22860,7 @@
                         <a:bodyPr/>
                         <a:lstStyle/>
                         <a:p>
+                          <a:pPr algn="ctr"/>
                           <a:r>
                             <a:rPr lang="pt-BR" sz="3200" dirty="0"/>
                             <a:t>4,89</a:t>
@@ -22868,6 +22874,7 @@
                         <a:bodyPr/>
                         <a:lstStyle/>
                         <a:p>
+                          <a:pPr algn="ctr"/>
                           <a:r>
                             <a:rPr lang="pt-BR" sz="3200" dirty="0"/>
                             <a:t>5</a:t>
@@ -22881,6 +22888,7 @@
                         <a:bodyPr/>
                         <a:lstStyle/>
                         <a:p>
+                          <a:pPr algn="ctr"/>
                           <a:r>
                             <a:rPr lang="pt-BR" sz="3200" dirty="0"/>
                             <a:t>4,91</a:t>
@@ -22894,6 +22902,7 @@
                         <a:bodyPr/>
                         <a:lstStyle/>
                         <a:p>
+                          <a:pPr algn="ctr"/>
                           <a:r>
                             <a:rPr lang="pt-BR" sz="3200" dirty="0"/>
                             <a:t>-13</a:t>
@@ -22907,6 +22916,7 @@
                         <a:bodyPr/>
                         <a:lstStyle/>
                         <a:p>
+                          <a:pPr algn="ctr"/>
                           <a:r>
                             <a:rPr lang="pt-BR" sz="3200" dirty="0"/>
                             <a:t>2</a:t>
@@ -22920,6 +22930,7 @@
                         <a:bodyPr/>
                         <a:lstStyle/>
                         <a:p>
+                          <a:pPr algn="ctr"/>
                           <a:r>
                             <a:rPr lang="pt-BR" sz="3200" dirty="0"/>
                             <a:t>8</a:t>
@@ -22933,6 +22944,7 @@
                         <a:bodyPr/>
                         <a:lstStyle/>
                         <a:p>
+                          <a:pPr algn="ctr"/>
                           <a:r>
                             <a:rPr lang="pt-BR" sz="3200" dirty="0"/>
                             <a:t>22</a:t>
@@ -22946,6 +22958,7 @@
                         <a:bodyPr/>
                         <a:lstStyle/>
                         <a:p>
+                          <a:pPr algn="ctr"/>
                           <a:r>
                             <a:rPr lang="pt-BR" sz="3200" dirty="0"/>
                             <a:t>0,02</a:t>
@@ -22959,6 +22972,7 @@
                         <a:bodyPr/>
                         <a:lstStyle/>
                         <a:p>
+                          <a:pPr algn="ctr"/>
                           <a:r>
                             <a:rPr lang="pt-BR" sz="3200" dirty="0"/>
                             <a:t>3,36</a:t>
@@ -22994,7 +23008,7 @@
               <p:nvPr>
                 <p:extLst>
                   <p:ext uri="{D42A27DB-BD31-4B8C-83A1-F6EECF244321}">
-                    <p14:modId xmlns:p14="http://schemas.microsoft.com/office/powerpoint/2010/main" val="172142269"/>
+                    <p14:modId xmlns:p14="http://schemas.microsoft.com/office/powerpoint/2010/main" val="3608648943"/>
                   </p:ext>
                 </p:extLst>
               </p:nvPr>
@@ -23261,6 +23275,7 @@
                         <a:bodyPr/>
                         <a:lstStyle/>
                         <a:p>
+                          <a:pPr algn="ctr"/>
                           <a:r>
                             <a:rPr lang="pt-BR" sz="3200" dirty="0"/>
                             <a:t>760</a:t>
@@ -23274,6 +23289,7 @@
                         <a:bodyPr/>
                         <a:lstStyle/>
                         <a:p>
+                          <a:pPr algn="ctr"/>
                           <a:r>
                             <a:rPr lang="pt-BR" sz="3200" dirty="0"/>
                             <a:t>4,89</a:t>
@@ -23287,6 +23303,7 @@
                         <a:bodyPr/>
                         <a:lstStyle/>
                         <a:p>
+                          <a:pPr algn="ctr"/>
                           <a:r>
                             <a:rPr lang="pt-BR" sz="3200" dirty="0"/>
                             <a:t>5</a:t>
@@ -23300,6 +23317,7 @@
                         <a:bodyPr/>
                         <a:lstStyle/>
                         <a:p>
+                          <a:pPr algn="ctr"/>
                           <a:r>
                             <a:rPr lang="pt-BR" sz="3200" dirty="0"/>
                             <a:t>4,91</a:t>
@@ -23313,6 +23331,7 @@
                         <a:bodyPr/>
                         <a:lstStyle/>
                         <a:p>
+                          <a:pPr algn="ctr"/>
                           <a:r>
                             <a:rPr lang="pt-BR" sz="3200" dirty="0"/>
                             <a:t>-13</a:t>
@@ -23326,6 +23345,7 @@
                         <a:bodyPr/>
                         <a:lstStyle/>
                         <a:p>
+                          <a:pPr algn="ctr"/>
                           <a:r>
                             <a:rPr lang="pt-BR" sz="3200" dirty="0"/>
                             <a:t>2</a:t>
@@ -23339,6 +23359,7 @@
                         <a:bodyPr/>
                         <a:lstStyle/>
                         <a:p>
+                          <a:pPr algn="ctr"/>
                           <a:r>
                             <a:rPr lang="pt-BR" sz="3200" dirty="0"/>
                             <a:t>8</a:t>
@@ -23352,6 +23373,7 @@
                         <a:bodyPr/>
                         <a:lstStyle/>
                         <a:p>
+                          <a:pPr algn="ctr"/>
                           <a:r>
                             <a:rPr lang="pt-BR" sz="3200" dirty="0"/>
                             <a:t>22</a:t>
@@ -23365,6 +23387,7 @@
                         <a:bodyPr/>
                         <a:lstStyle/>
                         <a:p>
+                          <a:pPr algn="ctr"/>
                           <a:r>
                             <a:rPr lang="pt-BR" sz="3200" dirty="0"/>
                             <a:t>0,02</a:t>
@@ -23378,6 +23401,7 @@
                         <a:bodyPr/>
                         <a:lstStyle/>
                         <a:p>
+                          <a:pPr algn="ctr"/>
                           <a:r>
                             <a:rPr lang="pt-BR" sz="3200" dirty="0"/>
                             <a:t>3,36</a:t>
@@ -23398,8 +23422,8 @@
           </p:graphicFrame>
         </mc:Fallback>
       </mc:AlternateContent>
-      <mc:AlternateContent xmlns:mc="http://schemas.openxmlformats.org/markup-compatibility/2006">
-        <mc:Choice xmlns:a14="http://schemas.microsoft.com/office/drawing/2010/main" Requires="a14">
+      <mc:AlternateContent xmlns:mc="http://schemas.openxmlformats.org/markup-compatibility/2006" xmlns:a14="http://schemas.microsoft.com/office/drawing/2010/main">
+        <mc:Choice Requires="a14">
           <p:sp>
             <p:nvSpPr>
               <p:cNvPr id="5" name="discussion">
@@ -23917,7 +23941,7 @@
             </p:txBody>
           </p:sp>
         </mc:Choice>
-        <mc:Fallback>
+        <mc:Fallback xmlns="">
           <p:sp>
             <p:nvSpPr>
               <p:cNvPr id="5" name="discussion">
@@ -24043,8 +24067,8 @@
           </a:p>
         </p:txBody>
       </p:sp>
-      <mc:AlternateContent xmlns:mc="http://schemas.openxmlformats.org/markup-compatibility/2006">
-        <mc:Choice xmlns:a14="http://schemas.microsoft.com/office/drawing/2010/main" Requires="a14">
+      <mc:AlternateContent xmlns:mc="http://schemas.openxmlformats.org/markup-compatibility/2006" xmlns:a14="http://schemas.microsoft.com/office/drawing/2010/main">
+        <mc:Choice Requires="a14">
           <p:graphicFrame>
             <p:nvGraphicFramePr>
               <p:cNvPr id="9" name="Tabela 8">
@@ -24314,25 +24338,7 @@
                                   <a:rPr lang="pt-BR" sz="3200" b="1" i="1" smtClean="0">
                                     <a:latin typeface="Cambria Math" panose="02040503050406030204" pitchFamily="18" charset="0"/>
                                   </a:rPr>
-                                  <m:t>=</m:t>
-                                </m:r>
-                                <m:r>
-                                  <a:rPr lang="pt-BR" sz="3200" b="1" i="1" smtClean="0">
-                                    <a:latin typeface="Cambria Math" panose="02040503050406030204" pitchFamily="18" charset="0"/>
-                                  </a:rPr>
-                                  <m:t>3</m:t>
-                                </m:r>
-                                <m:r>
-                                  <a:rPr lang="pt-BR" sz="3200" b="1" i="1" smtClean="0">
-                                    <a:latin typeface="Cambria Math" panose="02040503050406030204" pitchFamily="18" charset="0"/>
-                                  </a:rPr>
-                                  <m:t>,</m:t>
-                                </m:r>
-                                <m:r>
-                                  <a:rPr lang="pt-BR" sz="3200" b="1" i="1" smtClean="0">
-                                    <a:latin typeface="Cambria Math" panose="02040503050406030204" pitchFamily="18" charset="0"/>
-                                  </a:rPr>
-                                  <m:t>24</m:t>
+                                  <m:t>=3,24</m:t>
                                 </m:r>
                               </m:oMath>
                             </m:oMathPara>
@@ -24377,13 +24383,7 @@
                                   <a:rPr lang="pt-BR" sz="3200" b="1" i="1" smtClean="0">
                                     <a:latin typeface="Cambria Math" panose="02040503050406030204" pitchFamily="18" charset="0"/>
                                   </a:rPr>
-                                  <m:t>=</m:t>
-                                </m:r>
-                                <m:r>
-                                  <a:rPr lang="pt-BR" sz="3200" b="1" i="1" smtClean="0">
-                                    <a:latin typeface="Cambria Math" panose="02040503050406030204" pitchFamily="18" charset="0"/>
-                                  </a:rPr>
-                                  <m:t>5,35</m:t>
+                                  <m:t>=5,35</m:t>
                                 </m:r>
                               </m:oMath>
                             </m:oMathPara>
@@ -24859,13 +24859,7 @@
                                   <a:rPr lang="pt-BR" sz="3200" b="0" i="1" smtClean="0">
                                     <a:latin typeface="Cambria Math" panose="02040503050406030204" pitchFamily="18" charset="0"/>
                                   </a:rPr>
-                                  <m:t>=</m:t>
-                                </m:r>
-                                <m:r>
-                                  <a:rPr lang="pt-BR" sz="3200" b="0" i="1" smtClean="0">
-                                    <a:latin typeface="Cambria Math" panose="02040503050406030204" pitchFamily="18" charset="0"/>
-                                  </a:rPr>
-                                  <m:t>1,57</m:t>
+                                  <m:t>=1,57</m:t>
                                 </m:r>
                               </m:oMath>
                             </m:oMathPara>
@@ -24929,13 +24923,7 @@
                                   <a:rPr lang="pt-BR" sz="3200" b="0" i="1" smtClean="0">
                                     <a:latin typeface="Cambria Math" panose="02040503050406030204" pitchFamily="18" charset="0"/>
                                   </a:rPr>
-                                  <m:t>=0,</m:t>
-                                </m:r>
-                                <m:r>
-                                  <a:rPr lang="pt-BR" sz="3200" b="0" i="1" smtClean="0">
-                                    <a:latin typeface="Cambria Math" panose="02040503050406030204" pitchFamily="18" charset="0"/>
-                                  </a:rPr>
-                                  <m:t>22</m:t>
+                                  <m:t>=0,22</m:t>
                                 </m:r>
                               </m:oMath>
                             </m:oMathPara>
@@ -24956,7 +24944,7 @@
             </a:graphic>
           </p:graphicFrame>
         </mc:Choice>
-        <mc:Fallback>
+        <mc:Fallback xmlns="">
           <p:graphicFrame>
             <p:nvGraphicFramePr>
               <p:cNvPr id="9" name="Tabela 8">
@@ -26201,7 +26189,7 @@
         </p:blipFill>
         <p:spPr bwMode="auto">
           <a:xfrm>
-            <a:off x="28836253" y="40452324"/>
+            <a:off x="29186770" y="40452324"/>
             <a:ext cx="2431588" cy="1738527"/>
           </a:xfrm>
           <a:prstGeom prst="rect">
@@ -26248,7 +26236,7 @@
         </p:blipFill>
         <p:spPr bwMode="auto">
           <a:xfrm>
-            <a:off x="23494662" y="40560441"/>
+            <a:off x="24717639" y="40697869"/>
             <a:ext cx="2162730" cy="1539194"/>
           </a:xfrm>
           <a:prstGeom prst="rect">
@@ -26295,7 +26283,7 @@
         </p:blipFill>
         <p:spPr bwMode="auto">
           <a:xfrm>
-            <a:off x="26141799" y="40505617"/>
+            <a:off x="26771794" y="40527572"/>
             <a:ext cx="2414976" cy="1685234"/>
           </a:xfrm>
           <a:prstGeom prst="rect">
@@ -26315,57 +26303,40 @@
       </p:pic>
       <p:pic>
         <p:nvPicPr>
-          <p:cNvPr id="31" name="Picture 16" descr="GPS - Gestão de Processos e Serviços - Universidade Federal ...">
+          <p:cNvPr id="6" name="Imagem 5">
             <a:extLst>
               <a:ext uri="{FF2B5EF4-FFF2-40B4-BE49-F238E27FC236}">
-                <a16:creationId xmlns:a16="http://schemas.microsoft.com/office/drawing/2014/main" id="{C9461599-793B-B13E-9B6D-F1B27F21B2E3}"/>
+                <a16:creationId xmlns:a16="http://schemas.microsoft.com/office/drawing/2014/main" id="{05967790-00C1-279A-69E4-E42CF51C4741}"/>
               </a:ext>
             </a:extLst>
           </p:cNvPr>
           <p:cNvPicPr>
-            <a:picLocks noChangeAspect="1" noChangeArrowheads="1"/>
+            <a:picLocks noChangeAspect="1"/>
           </p:cNvPicPr>
           <p:nvPr/>
         </p:nvPicPr>
         <p:blipFill>
-          <a:blip r:embed="rId16">
-            <a:extLst>
-              <a:ext uri="{28A0092B-C50C-407E-A947-70E740481C1C}">
-                <a14:useLocalDpi xmlns:a14="http://schemas.microsoft.com/office/drawing/2010/main" val="0"/>
-              </a:ext>
-            </a:extLst>
-          </a:blip>
-          <a:srcRect/>
+          <a:blip r:embed="rId16"/>
           <a:stretch>
             <a:fillRect/>
           </a:stretch>
         </p:blipFill>
-        <p:spPr bwMode="auto">
+        <p:spPr>
           <a:xfrm>
-            <a:off x="19967091" y="40588415"/>
-            <a:ext cx="2564600" cy="1425878"/>
+            <a:off x="19523794" y="40422409"/>
+            <a:ext cx="2921978" cy="1625350"/>
           </a:xfrm>
           <a:prstGeom prst="rect">
             <a:avLst/>
           </a:prstGeom>
-          <a:noFill/>
-          <a:extLst>
-            <a:ext uri="{909E8E84-426E-40DD-AFC4-6F175D3DCCD1}">
-              <a14:hiddenFill xmlns:a14="http://schemas.microsoft.com/office/drawing/2010/main">
-                <a:solidFill>
-                  <a:srgbClr val="FFFFFF"/>
-                </a:solidFill>
-              </a14:hiddenFill>
-            </a:ext>
-          </a:extLst>
         </p:spPr>
       </p:pic>
       <p:pic>
         <p:nvPicPr>
-          <p:cNvPr id="33" name="Imagem 32">
+          <p:cNvPr id="12" name="Imagem 11">
             <a:extLst>
               <a:ext uri="{FF2B5EF4-FFF2-40B4-BE49-F238E27FC236}">
-                <a16:creationId xmlns:a16="http://schemas.microsoft.com/office/drawing/2014/main" id="{E358EFEC-16CD-8171-8875-36655C98E7FC}"/>
+                <a16:creationId xmlns:a16="http://schemas.microsoft.com/office/drawing/2014/main" id="{F243DE79-8A5F-163D-9FB4-782ECC5F3692}"/>
               </a:ext>
             </a:extLst>
           </p:cNvPr>
@@ -26382,8 +26353,38 @@
         </p:blipFill>
         <p:spPr>
           <a:xfrm>
-            <a:off x="17271541" y="40493707"/>
-            <a:ext cx="2162730" cy="1528780"/>
+            <a:off x="22535295" y="40755854"/>
+            <a:ext cx="2265676" cy="1387663"/>
+          </a:xfrm>
+          <a:prstGeom prst="rect">
+            <a:avLst/>
+          </a:prstGeom>
+        </p:spPr>
+      </p:pic>
+      <p:pic>
+        <p:nvPicPr>
+          <p:cNvPr id="15" name="Imagem 14">
+            <a:extLst>
+              <a:ext uri="{FF2B5EF4-FFF2-40B4-BE49-F238E27FC236}">
+                <a16:creationId xmlns:a16="http://schemas.microsoft.com/office/drawing/2014/main" id="{AA3B4C93-31D7-2D96-D84F-D9A90D170575}"/>
+              </a:ext>
+            </a:extLst>
+          </p:cNvPr>
+          <p:cNvPicPr>
+            <a:picLocks noChangeAspect="1"/>
+          </p:cNvPicPr>
+          <p:nvPr/>
+        </p:nvPicPr>
+        <p:blipFill>
+          <a:blip r:embed="rId18"/>
+          <a:stretch>
+            <a:fillRect/>
+          </a:stretch>
+        </p:blipFill>
+        <p:spPr>
+          <a:xfrm>
+            <a:off x="15554306" y="39001072"/>
+            <a:ext cx="2619352" cy="1852067"/>
           </a:xfrm>
           <a:prstGeom prst="rect">
             <a:avLst/>

--- a/Brasileirao/Poster_Brasileirao.pptx
+++ b/Brasileirao/Poster_Brasileirao.pptx
@@ -267,7 +267,7 @@
       </p15:sldGuideLst>
     </p:ext>
     <p:ext uri="GoogleSlidesCustomDataVersion2">
-      <go:slidesCustomData xmlns="" xmlns:mc="http://schemas.openxmlformats.org/markup-compatibility/2006" xmlns:mv="urn:schemas-microsoft-com:mac:vml" xmlns:c="http://schemas.openxmlformats.org/drawingml/2006/chart" xmlns:dgm="http://schemas.openxmlformats.org/drawingml/2006/diagram" xmlns:o="urn:schemas-microsoft-com:office:office" xmlns:v="urn:schemas-microsoft-com:vml" xmlns:pvml="urn:schemas-microsoft-com:office:powerpoint" xmlns:com="http://schemas.openxmlformats.org/drawingml/2006/compatibility" xmlns:p14="http://schemas.microsoft.com/office/powerpoint/2010/main" xmlns:p15="http://schemas.microsoft.com/office/powerpoint/2012/main" xmlns:ahyp="http://schemas.microsoft.com/office/drawing/2018/hyperlinkcolor" xmlns:go="http://customooxmlschemas.google.com/" r:id="rId7" roundtripDataSignature="AMtx7mhsp+FRlBeH/1tlbrDwfuOaZsMzjQ=="/>
+      <go:slidesCustomData xmlns:go="http://customooxmlschemas.google.com/" xmlns:ahyp="http://schemas.microsoft.com/office/drawing/2018/hyperlinkcolor" xmlns:p15="http://schemas.microsoft.com/office/powerpoint/2012/main" xmlns:p14="http://schemas.microsoft.com/office/powerpoint/2010/main" xmlns:com="http://schemas.openxmlformats.org/drawingml/2006/compatibility" xmlns:pvml="urn:schemas-microsoft-com:office:powerpoint" xmlns:v="urn:schemas-microsoft-com:vml" xmlns:o="urn:schemas-microsoft-com:office:office" xmlns:dgm="http://schemas.openxmlformats.org/drawingml/2006/diagram" xmlns:c="http://schemas.openxmlformats.org/drawingml/2006/chart" xmlns:mv="urn:schemas-microsoft-com:mac:vml" xmlns:mc="http://schemas.openxmlformats.org/markup-compatibility/2006" xmlns="" r:id="rId7" roundtripDataSignature="AMtx7mhsp+FRlBeH/1tlbrDwfuOaZsMzjQ=="/>
     </p:ext>
   </p:extLst>
 </p:presentation>
@@ -16942,8 +16942,8 @@
           </a:p>
         </p:txBody>
       </p:sp>
-      <mc:AlternateContent xmlns:mc="http://schemas.openxmlformats.org/markup-compatibility/2006">
-        <mc:Choice xmlns:a14="http://schemas.microsoft.com/office/drawing/2010/main" Requires="a14">
+      <mc:AlternateContent xmlns:mc="http://schemas.openxmlformats.org/markup-compatibility/2006" xmlns:a14="http://schemas.microsoft.com/office/drawing/2010/main">
+        <mc:Choice Requires="a14">
           <p:sp>
             <p:nvSpPr>
               <p:cNvPr id="1016" name="normal-def">
@@ -17473,7 +17473,18 @@
                                   <a:ea typeface="Cambria Math" panose="02040503050406030204" pitchFamily="18" charset="0"/>
                                   <a:cs typeface="Calibri"/>
                                 </a:rPr>
-                                <m:t>+1</m:t>
+                                <m:t>+</m:t>
+                              </m:r>
+                              <m:r>
+                                <a:rPr lang="pt-BR" sz="3600" b="0" i="1" smtClean="0">
+                                  <a:solidFill>
+                                    <a:srgbClr val="111111"/>
+                                  </a:solidFill>
+                                  <a:latin typeface="Cambria Math" panose="02040503050406030204" pitchFamily="18" charset="0"/>
+                                  <a:ea typeface="Cambria Math" panose="02040503050406030204" pitchFamily="18" charset="0"/>
+                                  <a:cs typeface="Calibri"/>
+                                </a:rPr>
+                                <m:t>1</m:t>
                               </m:r>
                             </m:num>
                             <m:den>
@@ -17675,7 +17686,7 @@
             </p:txBody>
           </p:sp>
         </mc:Choice>
-        <mc:Fallback>
+        <mc:Fallback xmlns="">
           <p:sp>
             <p:nvSpPr>
               <p:cNvPr id="1016" name="normal-def">
@@ -18468,7 +18479,18 @@
                         <a:ea typeface="Cambria Math" panose="02040503050406030204" pitchFamily="18" charset="0"/>
                         <a:cs typeface="Calibri"/>
                       </a:rPr>
-                      <m:t>&gt;0</m:t>
+                      <m:t>&gt;</m:t>
+                    </m:r>
+                    <m:r>
+                      <a:rPr lang="pt-BR" sz="3200" b="0" i="1" smtClean="0">
+                        <a:solidFill>
+                          <a:srgbClr val="111111"/>
+                        </a:solidFill>
+                        <a:latin typeface="Cambria Math" panose="02040503050406030204" pitchFamily="18" charset="0"/>
+                        <a:ea typeface="Cambria Math" panose="02040503050406030204" pitchFamily="18" charset="0"/>
+                        <a:cs typeface="Calibri"/>
+                      </a:rPr>
+                      <m:t>0</m:t>
                     </m:r>
                   </m:oMath>
                 </a14:m>
@@ -22001,7 +22023,18 @@
                                     <a:ea typeface="Calibri"/>
                                     <a:cs typeface="Calibri"/>
                                   </a:rPr>
-                                  <m:t>+1</m:t>
+                                  <m:t>+</m:t>
+                                </m:r>
+                                <m:r>
+                                  <a:rPr lang="pt-BR" sz="3600" i="1" dirty="0" smtClean="0">
+                                    <a:solidFill>
+                                      <a:srgbClr val="111111"/>
+                                    </a:solidFill>
+                                    <a:latin typeface="Cambria Math" panose="02040503050406030204" pitchFamily="18" charset="0"/>
+                                    <a:ea typeface="Calibri"/>
+                                    <a:cs typeface="Calibri"/>
+                                  </a:rPr>
+                                  <m:t>1</m:t>
                                 </m:r>
                               </m:e>
                             </m:d>
@@ -22197,7 +22230,18 @@
                         <a:ea typeface="Cambria Math" panose="02040503050406030204" pitchFamily="18" charset="0"/>
                         <a:cs typeface="Calibri"/>
                       </a:rPr>
-                      <m:t>&gt;0</m:t>
+                      <m:t>&gt;</m:t>
+                    </m:r>
+                    <m:r>
+                      <a:rPr lang="pt-BR" sz="3600" b="0" i="1" smtClean="0">
+                        <a:solidFill>
+                          <a:srgbClr val="111111"/>
+                        </a:solidFill>
+                        <a:latin typeface="Cambria Math" panose="02040503050406030204" pitchFamily="18" charset="0"/>
+                        <a:ea typeface="Cambria Math" panose="02040503050406030204" pitchFamily="18" charset="0"/>
+                        <a:cs typeface="Calibri"/>
+                      </a:rPr>
+                      <m:t>0</m:t>
                     </m:r>
                   </m:oMath>
                 </a14:m>
@@ -22272,8 +22316,8 @@
           </p:sp>
         </mc:Fallback>
       </mc:AlternateContent>
-      <mc:AlternateContent xmlns:mc="http://schemas.openxmlformats.org/markup-compatibility/2006">
-        <mc:Choice xmlns:a14="http://schemas.microsoft.com/office/drawing/2010/main" Requires="a14">
+      <mc:AlternateContent xmlns:mc="http://schemas.openxmlformats.org/markup-compatibility/2006" xmlns:a14="http://schemas.microsoft.com/office/drawing/2010/main">
+        <mc:Choice Requires="a14">
           <p:graphicFrame>
             <p:nvGraphicFramePr>
               <p:cNvPr id="4" name="Tabela 3">
@@ -22992,7 +23036,7 @@
             </a:graphic>
           </p:graphicFrame>
         </mc:Choice>
-        <mc:Fallback>
+        <mc:Fallback xmlns="">
           <p:graphicFrame>
             <p:nvGraphicFramePr>
               <p:cNvPr id="4" name="Tabela 3">
@@ -24189,7 +24233,25 @@
                                   <a:rPr lang="pt-BR" sz="3200" b="1" i="1" smtClean="0">
                                     <a:latin typeface="Cambria Math" panose="02040503050406030204" pitchFamily="18" charset="0"/>
                                   </a:rPr>
-                                  <m:t>=5,93</m:t>
+                                  <m:t>=</m:t>
+                                </m:r>
+                                <m:r>
+                                  <a:rPr lang="pt-BR" sz="3200" b="1" i="1" smtClean="0">
+                                    <a:latin typeface="Cambria Math" panose="02040503050406030204" pitchFamily="18" charset="0"/>
+                                  </a:rPr>
+                                  <m:t>5</m:t>
+                                </m:r>
+                                <m:r>
+                                  <a:rPr lang="pt-BR" sz="3200" b="1" i="1" smtClean="0">
+                                    <a:latin typeface="Cambria Math" panose="02040503050406030204" pitchFamily="18" charset="0"/>
+                                  </a:rPr>
+                                  <m:t>,</m:t>
+                                </m:r>
+                                <m:r>
+                                  <a:rPr lang="pt-BR" sz="3200" b="1" i="1" smtClean="0">
+                                    <a:latin typeface="Cambria Math" panose="02040503050406030204" pitchFamily="18" charset="0"/>
+                                  </a:rPr>
+                                  <m:t>93</m:t>
                                 </m:r>
                               </m:oMath>
                             </m:oMathPara>
@@ -24234,7 +24296,25 @@
                                   <a:rPr lang="pt-BR" sz="3200" b="1" i="1" smtClean="0">
                                     <a:latin typeface="Cambria Math" panose="02040503050406030204" pitchFamily="18" charset="0"/>
                                   </a:rPr>
-                                  <m:t>=1,59</m:t>
+                                  <m:t>=</m:t>
+                                </m:r>
+                                <m:r>
+                                  <a:rPr lang="pt-BR" sz="3200" b="1" i="1" smtClean="0">
+                                    <a:latin typeface="Cambria Math" panose="02040503050406030204" pitchFamily="18" charset="0"/>
+                                  </a:rPr>
+                                  <m:t>1</m:t>
+                                </m:r>
+                                <m:r>
+                                  <a:rPr lang="pt-BR" sz="3200" b="1" i="1" smtClean="0">
+                                    <a:latin typeface="Cambria Math" panose="02040503050406030204" pitchFamily="18" charset="0"/>
+                                  </a:rPr>
+                                  <m:t>,</m:t>
+                                </m:r>
+                                <m:r>
+                                  <a:rPr lang="pt-BR" sz="3200" b="1" i="1" smtClean="0">
+                                    <a:latin typeface="Cambria Math" panose="02040503050406030204" pitchFamily="18" charset="0"/>
+                                  </a:rPr>
+                                  <m:t>59</m:t>
                                 </m:r>
                               </m:oMath>
                             </m:oMathPara>
@@ -24338,7 +24418,25 @@
                                   <a:rPr lang="pt-BR" sz="3200" b="1" i="1" smtClean="0">
                                     <a:latin typeface="Cambria Math" panose="02040503050406030204" pitchFamily="18" charset="0"/>
                                   </a:rPr>
-                                  <m:t>=3,24</m:t>
+                                  <m:t>=</m:t>
+                                </m:r>
+                                <m:r>
+                                  <a:rPr lang="pt-BR" sz="3200" b="1" i="1" smtClean="0">
+                                    <a:latin typeface="Cambria Math" panose="02040503050406030204" pitchFamily="18" charset="0"/>
+                                  </a:rPr>
+                                  <m:t>3</m:t>
+                                </m:r>
+                                <m:r>
+                                  <a:rPr lang="pt-BR" sz="3200" b="1" i="1" smtClean="0">
+                                    <a:latin typeface="Cambria Math" panose="02040503050406030204" pitchFamily="18" charset="0"/>
+                                  </a:rPr>
+                                  <m:t>,</m:t>
+                                </m:r>
+                                <m:r>
+                                  <a:rPr lang="pt-BR" sz="3200" b="1" i="1" smtClean="0">
+                                    <a:latin typeface="Cambria Math" panose="02040503050406030204" pitchFamily="18" charset="0"/>
+                                  </a:rPr>
+                                  <m:t>24</m:t>
                                 </m:r>
                               </m:oMath>
                             </m:oMathPara>
@@ -24383,7 +24481,25 @@
                                   <a:rPr lang="pt-BR" sz="3200" b="1" i="1" smtClean="0">
                                     <a:latin typeface="Cambria Math" panose="02040503050406030204" pitchFamily="18" charset="0"/>
                                   </a:rPr>
-                                  <m:t>=5,35</m:t>
+                                  <m:t>=</m:t>
+                                </m:r>
+                                <m:r>
+                                  <a:rPr lang="pt-BR" sz="3200" b="1" i="1" smtClean="0">
+                                    <a:latin typeface="Cambria Math" panose="02040503050406030204" pitchFamily="18" charset="0"/>
+                                  </a:rPr>
+                                  <m:t>5</m:t>
+                                </m:r>
+                                <m:r>
+                                  <a:rPr lang="pt-BR" sz="3200" b="1" i="1" smtClean="0">
+                                    <a:latin typeface="Cambria Math" panose="02040503050406030204" pitchFamily="18" charset="0"/>
+                                  </a:rPr>
+                                  <m:t>,</m:t>
+                                </m:r>
+                                <m:r>
+                                  <a:rPr lang="pt-BR" sz="3200" b="1" i="1" smtClean="0">
+                                    <a:latin typeface="Cambria Math" panose="02040503050406030204" pitchFamily="18" charset="0"/>
+                                  </a:rPr>
+                                  <m:t>35</m:t>
                                 </m:r>
                               </m:oMath>
                             </m:oMathPara>
@@ -24432,7 +24548,25 @@
                                   <a:rPr lang="pt-BR" sz="3200" b="0" i="1" smtClean="0">
                                     <a:latin typeface="Cambria Math" panose="02040503050406030204" pitchFamily="18" charset="0"/>
                                   </a:rPr>
-                                  <m:t>=0,58</m:t>
+                                  <m:t>=</m:t>
+                                </m:r>
+                                <m:r>
+                                  <a:rPr lang="pt-BR" sz="3200" b="0" i="1" smtClean="0">
+                                    <a:latin typeface="Cambria Math" panose="02040503050406030204" pitchFamily="18" charset="0"/>
+                                  </a:rPr>
+                                  <m:t>0</m:t>
+                                </m:r>
+                                <m:r>
+                                  <a:rPr lang="pt-BR" sz="3200" b="0" i="1" smtClean="0">
+                                    <a:latin typeface="Cambria Math" panose="02040503050406030204" pitchFamily="18" charset="0"/>
+                                  </a:rPr>
+                                  <m:t>,</m:t>
+                                </m:r>
+                                <m:r>
+                                  <a:rPr lang="pt-BR" sz="3200" b="0" i="1" smtClean="0">
+                                    <a:latin typeface="Cambria Math" panose="02040503050406030204" pitchFamily="18" charset="0"/>
+                                  </a:rPr>
+                                  <m:t>58</m:t>
                                 </m:r>
                               </m:oMath>
                             </m:oMathPara>
@@ -24538,7 +24672,25 @@
                                   <a:rPr lang="pt-BR" sz="3200" b="0" i="1" smtClean="0">
                                     <a:latin typeface="Cambria Math" panose="02040503050406030204" pitchFamily="18" charset="0"/>
                                   </a:rPr>
-                                  <m:t>=2,67</m:t>
+                                  <m:t>=</m:t>
+                                </m:r>
+                                <m:r>
+                                  <a:rPr lang="pt-BR" sz="3200" b="0" i="1" smtClean="0">
+                                    <a:latin typeface="Cambria Math" panose="02040503050406030204" pitchFamily="18" charset="0"/>
+                                  </a:rPr>
+                                  <m:t>2</m:t>
+                                </m:r>
+                                <m:r>
+                                  <a:rPr lang="pt-BR" sz="3200" b="0" i="1" smtClean="0">
+                                    <a:latin typeface="Cambria Math" panose="02040503050406030204" pitchFamily="18" charset="0"/>
+                                  </a:rPr>
+                                  <m:t>,</m:t>
+                                </m:r>
+                                <m:r>
+                                  <a:rPr lang="pt-BR" sz="3200" b="0" i="1" smtClean="0">
+                                    <a:latin typeface="Cambria Math" panose="02040503050406030204" pitchFamily="18" charset="0"/>
+                                  </a:rPr>
+                                  <m:t>67</m:t>
                                 </m:r>
                               </m:oMath>
                             </m:oMathPara>
@@ -24611,7 +24763,25 @@
                                   <a:rPr lang="pt-BR" sz="3200" b="0" i="1" smtClean="0">
                                     <a:latin typeface="Cambria Math" panose="02040503050406030204" pitchFamily="18" charset="0"/>
                                   </a:rPr>
-                                  <m:t>=2,26</m:t>
+                                  <m:t>=</m:t>
+                                </m:r>
+                                <m:r>
+                                  <a:rPr lang="pt-BR" sz="3200" b="0" i="1" smtClean="0">
+                                    <a:latin typeface="Cambria Math" panose="02040503050406030204" pitchFamily="18" charset="0"/>
+                                  </a:rPr>
+                                  <m:t>2</m:t>
+                                </m:r>
+                                <m:r>
+                                  <a:rPr lang="pt-BR" sz="3200" b="0" i="1" smtClean="0">
+                                    <a:latin typeface="Cambria Math" panose="02040503050406030204" pitchFamily="18" charset="0"/>
+                                  </a:rPr>
+                                  <m:t>,</m:t>
+                                </m:r>
+                                <m:r>
+                                  <a:rPr lang="pt-BR" sz="3200" b="0" i="1" smtClean="0">
+                                    <a:latin typeface="Cambria Math" panose="02040503050406030204" pitchFamily="18" charset="0"/>
+                                  </a:rPr>
+                                  <m:t>26</m:t>
                                 </m:r>
                               </m:oMath>
                             </m:oMathPara>
@@ -24729,7 +24899,25 @@
                                   <a:rPr lang="pt-BR" sz="3200" b="0" i="1" smtClean="0">
                                     <a:latin typeface="Cambria Math" panose="02040503050406030204" pitchFamily="18" charset="0"/>
                                   </a:rPr>
-                                  <m:t>=5,01</m:t>
+                                  <m:t>=</m:t>
+                                </m:r>
+                                <m:r>
+                                  <a:rPr lang="pt-BR" sz="3200" b="0" i="1" smtClean="0">
+                                    <a:latin typeface="Cambria Math" panose="02040503050406030204" pitchFamily="18" charset="0"/>
+                                  </a:rPr>
+                                  <m:t>5</m:t>
+                                </m:r>
+                                <m:r>
+                                  <a:rPr lang="pt-BR" sz="3200" b="0" i="1" smtClean="0">
+                                    <a:latin typeface="Cambria Math" panose="02040503050406030204" pitchFamily="18" charset="0"/>
+                                  </a:rPr>
+                                  <m:t>,</m:t>
+                                </m:r>
+                                <m:r>
+                                  <a:rPr lang="pt-BR" sz="3200" b="0" i="1" smtClean="0">
+                                    <a:latin typeface="Cambria Math" panose="02040503050406030204" pitchFamily="18" charset="0"/>
+                                  </a:rPr>
+                                  <m:t>01</m:t>
                                 </m:r>
                               </m:oMath>
                             </m:oMathPara>
@@ -24793,7 +24981,25 @@
                                   <a:rPr lang="pt-BR" sz="3200" b="0" i="1" smtClean="0">
                                     <a:latin typeface="Cambria Math" panose="02040503050406030204" pitchFamily="18" charset="0"/>
                                   </a:rPr>
-                                  <m:t>=0,8</m:t>
+                                  <m:t>=</m:t>
+                                </m:r>
+                                <m:r>
+                                  <a:rPr lang="pt-BR" sz="3200" b="0" i="1" smtClean="0">
+                                    <a:latin typeface="Cambria Math" panose="02040503050406030204" pitchFamily="18" charset="0"/>
+                                  </a:rPr>
+                                  <m:t>0</m:t>
+                                </m:r>
+                                <m:r>
+                                  <a:rPr lang="pt-BR" sz="3200" b="0" i="1" smtClean="0">
+                                    <a:latin typeface="Cambria Math" panose="02040503050406030204" pitchFamily="18" charset="0"/>
+                                  </a:rPr>
+                                  <m:t>,</m:t>
+                                </m:r>
+                                <m:r>
+                                  <a:rPr lang="pt-BR" sz="3200" b="0" i="1" smtClean="0">
+                                    <a:latin typeface="Cambria Math" panose="02040503050406030204" pitchFamily="18" charset="0"/>
+                                  </a:rPr>
+                                  <m:t>8</m:t>
                                 </m:r>
                               </m:oMath>
                             </m:oMathPara>
@@ -24859,7 +25065,25 @@
                                   <a:rPr lang="pt-BR" sz="3200" b="0" i="1" smtClean="0">
                                     <a:latin typeface="Cambria Math" panose="02040503050406030204" pitchFamily="18" charset="0"/>
                                   </a:rPr>
-                                  <m:t>=1,57</m:t>
+                                  <m:t>=</m:t>
+                                </m:r>
+                                <m:r>
+                                  <a:rPr lang="pt-BR" sz="3200" b="0" i="1" smtClean="0">
+                                    <a:latin typeface="Cambria Math" panose="02040503050406030204" pitchFamily="18" charset="0"/>
+                                  </a:rPr>
+                                  <m:t>1</m:t>
+                                </m:r>
+                                <m:r>
+                                  <a:rPr lang="pt-BR" sz="3200" b="0" i="1" smtClean="0">
+                                    <a:latin typeface="Cambria Math" panose="02040503050406030204" pitchFamily="18" charset="0"/>
+                                  </a:rPr>
+                                  <m:t>,</m:t>
+                                </m:r>
+                                <m:r>
+                                  <a:rPr lang="pt-BR" sz="3200" b="0" i="1" smtClean="0">
+                                    <a:latin typeface="Cambria Math" panose="02040503050406030204" pitchFamily="18" charset="0"/>
+                                  </a:rPr>
+                                  <m:t>57</m:t>
                                 </m:r>
                               </m:oMath>
                             </m:oMathPara>
@@ -24923,7 +25147,25 @@
                                   <a:rPr lang="pt-BR" sz="3200" b="0" i="1" smtClean="0">
                                     <a:latin typeface="Cambria Math" panose="02040503050406030204" pitchFamily="18" charset="0"/>
                                   </a:rPr>
-                                  <m:t>=0,22</m:t>
+                                  <m:t>=</m:t>
+                                </m:r>
+                                <m:r>
+                                  <a:rPr lang="pt-BR" sz="3200" b="0" i="1" smtClean="0">
+                                    <a:latin typeface="Cambria Math" panose="02040503050406030204" pitchFamily="18" charset="0"/>
+                                  </a:rPr>
+                                  <m:t>0</m:t>
+                                </m:r>
+                                <m:r>
+                                  <a:rPr lang="pt-BR" sz="3200" b="0" i="1" smtClean="0">
+                                    <a:latin typeface="Cambria Math" panose="02040503050406030204" pitchFamily="18" charset="0"/>
+                                  </a:rPr>
+                                  <m:t>,</m:t>
+                                </m:r>
+                                <m:r>
+                                  <a:rPr lang="pt-BR" sz="3200" b="0" i="1" smtClean="0">
+                                    <a:latin typeface="Cambria Math" panose="02040503050406030204" pitchFamily="18" charset="0"/>
+                                  </a:rPr>
+                                  <m:t>22</m:t>
                                 </m:r>
                               </m:oMath>
                             </m:oMathPara>
@@ -26383,7 +26625,7 @@
         </p:blipFill>
         <p:spPr>
           <a:xfrm>
-            <a:off x="15554306" y="39001072"/>
+            <a:off x="16994898" y="40326398"/>
             <a:ext cx="2619352" cy="1852067"/>
           </a:xfrm>
           <a:prstGeom prst="rect">
